--- a/dataset/guides_final/ACC/guide/IT-ACC-001_사내 SSO 로그인 오류 대응 가이드.pptx
+++ b/dataset/guides_final/ACC/guide/IT-ACC-001_사내 SSO 로그인 오류 대응 가이드.pptx
@@ -3246,7 +3246,7 @@
                 <a:ea typeface="Malgun Gothic"/>
                 <a:cs typeface="Malgun Gothic"/>
               </a:rPr>
-              <a:t>한화시스템 ICT 임직원 IT 안내 · 계정·로그인</a:t>
+              <a:t>가상 ICT 기업 임직원 IT 안내 · 계정·로그인</a:t>
             </a:r>
           </a:p>
         </p:txBody>
@@ -3478,7 +3478,7 @@
                 <a:ea typeface="Malgun Gothic"/>
                 <a:cs typeface="Malgun Gothic"/>
               </a:rPr>
-              <a:t>© HANWHA SYSTEMS ICT · IT-ACC-001 · 사내 일반</a:t>
+              <a:t>© 가상 ICT 기업 · IT-ACC-001 · 사내 일반</a:t>
             </a:r>
           </a:p>
         </p:txBody>
@@ -3726,7 +3726,7 @@
                 <a:ea typeface="Malgun Gothic"/>
                 <a:cs typeface="Malgun Gothic"/>
               </a:rPr>
-              <a:t>© HANWHA SYSTEMS ICT · IT-ACC-001 · 사내 일반</a:t>
+              <a:t>© 가상 ICT 기업 · IT-ACC-001 · 사내 일반</a:t>
             </a:r>
           </a:p>
         </p:txBody>
@@ -5977,7 +5977,7 @@
                 <a:ea typeface="Malgun Gothic"/>
                 <a:cs typeface="Malgun Gothic"/>
               </a:rPr>
-              <a:t>© HANWHA SYSTEMS ICT · IT-ACC-001 · 사내 일반</a:t>
+              <a:t>© 가상 ICT 기업 · IT-ACC-001 · 사내 일반</a:t>
             </a:r>
           </a:p>
         </p:txBody>
@@ -8007,7 +8007,7 @@
                 <a:ea typeface="Malgun Gothic"/>
                 <a:cs typeface="Malgun Gothic"/>
               </a:rPr>
-              <a:t>© HANWHA SYSTEMS ICT · IT-ACC-001 · 사내 일반</a:t>
+              <a:t>© 가상 ICT 기업 · IT-ACC-001 · 사내 일반</a:t>
             </a:r>
           </a:p>
         </p:txBody>
@@ -9395,7 +9395,7 @@
                 <a:ea typeface="Malgun Gothic"/>
                 <a:cs typeface="Malgun Gothic"/>
               </a:rPr>
-              <a:t>© HANWHA SYSTEMS ICT · IT-ACC-001 · 사내 일반</a:t>
+              <a:t>© 가상 ICT 기업 · IT-ACC-001 · 사내 일반</a:t>
             </a:r>
           </a:p>
         </p:txBody>
@@ -11447,7 +11447,7 @@
                 <a:ea typeface="Malgun Gothic"/>
                 <a:cs typeface="Malgun Gothic"/>
               </a:rPr>
-              <a:t>© HANWHA SYSTEMS ICT · IT-ACC-001 · 사내 일반</a:t>
+              <a:t>© 가상 ICT 기업 · IT-ACC-001 · 사내 일반</a:t>
             </a:r>
           </a:p>
         </p:txBody>
@@ -12972,7 +12972,7 @@
                 <a:ea typeface="Malgun Gothic"/>
                 <a:cs typeface="Malgun Gothic"/>
               </a:rPr>
-              <a:t>© HANWHA SYSTEMS ICT · IT-ACC-001 · 사내 일반</a:t>
+              <a:t>© 가상 ICT 기업 · IT-ACC-001 · 사내 일반</a:t>
             </a:r>
           </a:p>
         </p:txBody>
@@ -14844,7 +14844,7 @@
                 <a:ea typeface="Malgun Gothic"/>
                 <a:cs typeface="Malgun Gothic"/>
               </a:rPr>
-              <a:t>© HANWHA SYSTEMS ICT · IT-ACC-001 · 사내 일반</a:t>
+              <a:t>© 가상 ICT 기업 · IT-ACC-001 · 사내 일반</a:t>
             </a:r>
           </a:p>
         </p:txBody>
@@ -16460,7 +16460,7 @@
                 <a:ea typeface="Malgun Gothic"/>
                 <a:cs typeface="Malgun Gothic"/>
               </a:rPr>
-              <a:t>※ 단축키: macOS는 Command + Shift + Delete. 시크릿 창은 Chrome Ctrl + Shift + N, Edge Ctrl + Shift + P. 주소는 https://sso.hanwha-ict.example 을 직접 입력합니다.</a:t>
+              <a:t>※ 단축키: macOS는 Command + Shift + Delete. 시크릿 창은 Chrome Ctrl + Shift + N, Edge Ctrl + Shift + P. 주소는 https://sso.ict.example 을 직접 입력합니다.</a:t>
             </a:r>
           </a:p>
         </p:txBody>
@@ -16507,7 +16507,7 @@
                 <a:ea typeface="Malgun Gothic"/>
                 <a:cs typeface="Malgun Gothic"/>
               </a:rPr>
-              <a:t>© HANWHA SYSTEMS ICT · IT-ACC-001 · 사내 일반</a:t>
+              <a:t>© 가상 ICT 기업 · IT-ACC-001 · 사내 일반</a:t>
             </a:r>
           </a:p>
         </p:txBody>
@@ -18296,7 +18296,7 @@
                 <a:ea typeface="Malgun Gothic"/>
                 <a:cs typeface="Malgun Gothic"/>
               </a:rPr>
-              <a:t>© HANWHA SYSTEMS ICT · IT-ACC-001 · 사내 일반</a:t>
+              <a:t>© 가상 ICT 기업 · IT-ACC-001 · 사내 일반</a:t>
             </a:r>
           </a:p>
         </p:txBody>
@@ -19684,7 +19684,7 @@
                 <a:ea typeface="Malgun Gothic"/>
                 <a:cs typeface="Malgun Gothic"/>
               </a:rPr>
-              <a:t>© HANWHA SYSTEMS ICT · IT-ACC-001 · 사내 일반</a:t>
+              <a:t>© 가상 ICT 기업 · IT-ACC-001 · 사내 일반</a:t>
             </a:r>
           </a:p>
         </p:txBody>
@@ -21513,7 +21513,7 @@
                 <a:ea typeface="Malgun Gothic"/>
                 <a:cs typeface="Malgun Gothic"/>
               </a:rPr>
-              <a:t>© HANWHA SYSTEMS ICT · IT-ACC-001 · 사내 일반</a:t>
+              <a:t>© 가상 ICT 기업 · IT-ACC-001 · 사내 일반</a:t>
             </a:r>
           </a:p>
         </p:txBody>
@@ -23210,7 +23210,7 @@
                 <a:ea typeface="Malgun Gothic"/>
                 <a:cs typeface="Malgun Gothic"/>
               </a:rPr>
-              <a:t>© HANWHA SYSTEMS ICT · IT-ACC-001 · 사내 일반</a:t>
+              <a:t>© 가상 ICT 기업 · IT-ACC-001 · 사내 일반</a:t>
             </a:r>
           </a:p>
         </p:txBody>
@@ -24528,7 +24528,7 @@
                 <a:ea typeface="Malgun Gothic"/>
                 <a:cs typeface="Malgun Gothic"/>
               </a:rPr>
-              <a:t>© HANWHA SYSTEMS ICT · IT-ACC-001 · 사내 일반</a:t>
+              <a:t>© 가상 ICT 기업 · IT-ACC-001 · 사내 일반</a:t>
             </a:r>
           </a:p>
         </p:txBody>
@@ -26400,7 +26400,7 @@
                 <a:ea typeface="Malgun Gothic"/>
                 <a:cs typeface="Malgun Gothic"/>
               </a:rPr>
-              <a:t>© HANWHA SYSTEMS ICT · IT-ACC-001 · 사내 일반</a:t>
+              <a:t>© 가상 ICT 기업 · IT-ACC-001 · 사내 일반</a:t>
             </a:r>
           </a:p>
         </p:txBody>
@@ -27624,7 +27624,7 @@
                 <a:ea typeface="Malgun Gothic"/>
                 <a:cs typeface="Malgun Gothic"/>
               </a:rPr>
-              <a:t>© HANWHA SYSTEMS ICT · IT-ACC-001 · 사내 일반</a:t>
+              <a:t>© 가상 ICT 기업 · IT-ACC-001 · 사내 일반</a:t>
             </a:r>
           </a:p>
         </p:txBody>
@@ -27872,7 +27872,7 @@
                 <a:ea typeface="Malgun Gothic"/>
                 <a:cs typeface="Malgun Gothic"/>
               </a:rPr>
-              <a:t>© HANWHA SYSTEMS ICT · IT-ACC-001 · 사내 일반</a:t>
+              <a:t>© 가상 ICT 기업 · IT-ACC-001 · 사내 일반</a:t>
             </a:r>
           </a:p>
         </p:txBody>
@@ -28877,7 +28877,7 @@
                 <a:ea typeface="Malgun Gothic"/>
                 <a:cs typeface="Malgun Gothic"/>
               </a:rPr>
-              <a:t>© HANWHA SYSTEMS ICT · IT-ACC-001 · 사내 일반</a:t>
+              <a:t>© 가상 ICT 기업 · IT-ACC-001 · 사내 일반</a:t>
             </a:r>
           </a:p>
         </p:txBody>
@@ -29125,7 +29125,7 @@
                 <a:ea typeface="Malgun Gothic"/>
                 <a:cs typeface="Malgun Gothic"/>
               </a:rPr>
-              <a:t>© HANWHA SYSTEMS ICT · IT-ACC-001 · 사내 일반</a:t>
+              <a:t>© 가상 ICT 기업 · IT-ACC-001 · 사내 일반</a:t>
             </a:r>
           </a:p>
         </p:txBody>
@@ -29547,7 +29547,7 @@
                 <a:ea typeface="Malgun Gothic"/>
                 <a:cs typeface="Malgun Gothic"/>
               </a:rPr>
-              <a:t>로그인 주소는 즐겨찾기 대신 https://sso.hanwha-ict.example 을 직접 입력합니다.</a:t>
+              <a:t>로그인 주소는 즐겨찾기 대신 https://sso.ict.example 을 직접 입력합니다.</a:t>
             </a:r>
           </a:p>
         </p:txBody>
@@ -29876,7 +29876,7 @@
                 <a:ea typeface="Malgun Gothic"/>
                 <a:cs typeface="Malgun Gothic"/>
               </a:rPr>
-              <a:t>© HANWHA SYSTEMS ICT · IT-ACC-001 · 사내 일반</a:t>
+              <a:t>© 가상 ICT 기업 · IT-ACC-001 · 사내 일반</a:t>
             </a:r>
           </a:p>
         </p:txBody>
@@ -30124,7 +30124,7 @@
                 <a:ea typeface="Malgun Gothic"/>
                 <a:cs typeface="Malgun Gothic"/>
               </a:rPr>
-              <a:t>© HANWHA SYSTEMS ICT · IT-ACC-001 · 사내 일반</a:t>
+              <a:t>© 가상 ICT 기업 · IT-ACC-001 · 사내 일반</a:t>
             </a:r>
           </a:p>
         </p:txBody>
@@ -30636,7 +30636,7 @@
                           <a:ea typeface="Malgun Gothic"/>
                           <a:cs typeface="Malgun Gothic"/>
                         </a:rPr>
-                        <a:t>사내 IT 포털(hanwha-admin) 상단 [챗봇 문의]</a:t>
+                        <a:t>사내 IT 포털 상단 [챗봇 문의]</a:t>
                       </a:r>
                     </a:p>
                   </a:txBody>
@@ -31328,7 +31328,7 @@
                           <a:ea typeface="Malgun Gothic"/>
                           <a:cs typeface="Malgun Gothic"/>
                         </a:rPr>
-                        <a:t>it-helpdesk@hanwha-ict.example</a:t>
+                        <a:t>it-helpdesk@ict.example</a:t>
                       </a:r>
                     </a:p>
                   </a:txBody>
@@ -31627,7 +31627,7 @@
                 <a:ea typeface="Malgun Gothic"/>
                 <a:cs typeface="Malgun Gothic"/>
               </a:rPr>
-              <a:t>© HANWHA SYSTEMS ICT · IT-ACC-001 · 사내 일반</a:t>
+              <a:t>© 가상 ICT 기업 · IT-ACC-001 · 사내 일반</a:t>
             </a:r>
           </a:p>
         </p:txBody>
@@ -32903,7 +32903,7 @@
                 <a:ea typeface="Malgun Gothic"/>
                 <a:cs typeface="Malgun Gothic"/>
               </a:rPr>
-              <a:t>© HANWHA SYSTEMS ICT · IT-ACC-001 · 사내 일반</a:t>
+              <a:t>© 가상 ICT 기업 · IT-ACC-001 · 사내 일반</a:t>
             </a:r>
           </a:p>
         </p:txBody>
@@ -33151,7 +33151,7 @@
                 <a:ea typeface="Malgun Gothic"/>
                 <a:cs typeface="Malgun Gothic"/>
               </a:rPr>
-              <a:t>© HANWHA SYSTEMS ICT · IT-ACC-001 · 사내 일반</a:t>
+              <a:t>© 가상 ICT 기업 · IT-ACC-001 · 사내 일반</a:t>
             </a:r>
           </a:p>
         </p:txBody>
@@ -34844,7 +34844,7 @@
                 <a:ea typeface="Malgun Gothic"/>
                 <a:cs typeface="Malgun Gothic"/>
               </a:rPr>
-              <a:t>© HANWHA SYSTEMS ICT · IT-ACC-001 · 사내 일반</a:t>
+              <a:t>© 가상 ICT 기업 · IT-ACC-001 · 사내 일반</a:t>
             </a:r>
           </a:p>
         </p:txBody>
@@ -35984,7 +35984,7 @@
                 <a:ea typeface="Malgun Gothic"/>
                 <a:cs typeface="Malgun Gothic"/>
               </a:rPr>
-              <a:t>© HANWHA SYSTEMS ICT · IT-ACC-001 · 사내 일반</a:t>
+              <a:t>© 가상 ICT 기업 · IT-ACC-001 · 사내 일반</a:t>
             </a:r>
           </a:p>
         </p:txBody>
@@ -37429,7 +37429,7 @@
                 <a:ea typeface="Malgun Gothic"/>
                 <a:cs typeface="Malgun Gothic"/>
               </a:rPr>
-              <a:t>© HANWHA SYSTEMS ICT · IT-ACC-001 · 사내 일반</a:t>
+              <a:t>© 가상 ICT 기업 · IT-ACC-001 · 사내 일반</a:t>
             </a:r>
           </a:p>
         </p:txBody>
@@ -37677,7 +37677,7 @@
                 <a:ea typeface="Malgun Gothic"/>
                 <a:cs typeface="Malgun Gothic"/>
               </a:rPr>
-              <a:t>© HANWHA SYSTEMS ICT · IT-ACC-001 · 사내 일반</a:t>
+              <a:t>© 가상 ICT 기업 · IT-ACC-001 · 사내 일반</a:t>
             </a:r>
           </a:p>
         </p:txBody>
@@ -39114,7 +39114,7 @@
                 <a:ea typeface="Malgun Gothic"/>
                 <a:cs typeface="Malgun Gothic"/>
               </a:rPr>
-              <a:t>통합 로그인 https://sso.hanwha-ict.example</a:t>
+              <a:t>통합 로그인 https://sso.ict.example</a:t>
             </a:r>
           </a:p>
         </p:txBody>
@@ -39349,7 +39349,7 @@
                 <a:ea typeface="Malgun Gothic"/>
                 <a:cs typeface="Malgun Gothic"/>
               </a:rPr>
-              <a:t>© HANWHA SYSTEMS ICT · IT-ACC-001 · 사내 일반</a:t>
+              <a:t>© 가상 ICT 기업 · IT-ACC-001 · 사내 일반</a:t>
             </a:r>
           </a:p>
         </p:txBody>
@@ -39597,7 +39597,7 @@
                 <a:ea typeface="Malgun Gothic"/>
                 <a:cs typeface="Malgun Gothic"/>
               </a:rPr>
-              <a:t>© HANWHA SYSTEMS ICT · IT-ACC-001 · 사내 일반</a:t>
+              <a:t>© 가상 ICT 기업 · IT-ACC-001 · 사내 일반</a:t>
             </a:r>
           </a:p>
         </p:txBody>
@@ -40590,7 +40590,7 @@
                 <a:ea typeface="Malgun Gothic"/>
                 <a:cs typeface="Malgun Gothic"/>
               </a:rPr>
-              <a:t>© HANWHA SYSTEMS ICT · IT-ACC-001 · 사내 일반</a:t>
+              <a:t>© 가상 ICT 기업 · IT-ACC-001 · 사내 일반</a:t>
             </a:r>
           </a:p>
         </p:txBody>
@@ -42450,7 +42450,7 @@
                 <a:ea typeface="Malgun Gothic"/>
                 <a:cs typeface="Malgun Gothic"/>
               </a:rPr>
-              <a:t>© HANWHA SYSTEMS ICT · IT-ACC-001 · 사내 일반</a:t>
+              <a:t>© 가상 ICT 기업 · IT-ACC-001 · 사내 일반</a:t>
             </a:r>
           </a:p>
         </p:txBody>
@@ -44644,7 +44644,7 @@
                 <a:ea typeface="Malgun Gothic"/>
                 <a:cs typeface="Malgun Gothic"/>
               </a:rPr>
-              <a:t>© HANWHA SYSTEMS ICT · IT-ACC-001 · 사내 일반</a:t>
+              <a:t>© 가상 ICT 기업 · IT-ACC-001 · 사내 일반</a:t>
             </a:r>
           </a:p>
         </p:txBody>
